--- a/library/lectures/lec-03/rendered/lec-03-en.pptx
+++ b/library/lectures/lec-03/rendered/lec-03-en.pptx
@@ -7898,45 +7898,6 @@
           </a:p>
         </p:txBody>
       </p:sp>
-      <p:sp>
-        <p:nvSpPr>
-          <p:cNvPr id="22" name="TextBox 21"/>
-          <p:cNvSpPr txBox="1"/>
-          <p:nvPr/>
-        </p:nvSpPr>
-        <p:spPr>
-          <a:xfrm>
-            <a:off x="11274552" y="6547104"/>
-            <a:ext cx="868680" cy="256032"/>
-          </a:xfrm>
-          <a:prstGeom prst="rect">
-            <a:avLst/>
-          </a:prstGeom>
-          <a:noFill/>
-        </p:spPr>
-        <p:txBody>
-          <a:bodyPr wrap="none" lIns="0" rIns="0" tIns="0" bIns="0">
-            <a:spAutoFit/>
-          </a:bodyPr>
-          <a:lstStyle/>
-          <a:p>
-            <a:pPr algn="r">
-              <a:lnSpc>
-                <a:spcPct val="100000"/>
-              </a:lnSpc>
-            </a:pPr>
-            <a:r>
-              <a:rPr sz="1000" i="1">
-                <a:solidFill>
-                  <a:srgbClr val="5B6678"/>
-                </a:solidFill>
-                <a:latin typeface="Arial"/>
-              </a:rPr>
-              <a:t>1 / 40</a:t>
-            </a:r>
-          </a:p>
-        </p:txBody>
-      </p:sp>
     </p:spTree>
   </p:cSld>
   <p:clrMapOvr>
@@ -8929,45 +8890,6 @@
           </a:p>
         </p:txBody>
       </p:sp>
-      <p:sp>
-        <p:nvSpPr>
-          <p:cNvPr id="23" name="TextBox 22"/>
-          <p:cNvSpPr txBox="1"/>
-          <p:nvPr/>
-        </p:nvSpPr>
-        <p:spPr>
-          <a:xfrm>
-            <a:off x="11274552" y="6547104"/>
-            <a:ext cx="868680" cy="256032"/>
-          </a:xfrm>
-          <a:prstGeom prst="rect">
-            <a:avLst/>
-          </a:prstGeom>
-          <a:noFill/>
-        </p:spPr>
-        <p:txBody>
-          <a:bodyPr wrap="none" lIns="0" rIns="0" tIns="0" bIns="0">
-            <a:spAutoFit/>
-          </a:bodyPr>
-          <a:lstStyle/>
-          <a:p>
-            <a:pPr algn="r">
-              <a:lnSpc>
-                <a:spcPct val="100000"/>
-              </a:lnSpc>
-            </a:pPr>
-            <a:r>
-              <a:rPr sz="1000" i="1">
-                <a:solidFill>
-                  <a:srgbClr val="5B6678"/>
-                </a:solidFill>
-                <a:latin typeface="Arial"/>
-              </a:rPr>
-              <a:t>10 / 40</a:t>
-            </a:r>
-          </a:p>
-        </p:txBody>
-      </p:sp>
     </p:spTree>
   </p:cSld>
   <p:clrMapOvr>
@@ -9589,45 +9511,6 @@
           </a:p>
         </p:txBody>
       </p:sp>
-      <p:sp>
-        <p:nvSpPr>
-          <p:cNvPr id="15" name="TextBox 14"/>
-          <p:cNvSpPr txBox="1"/>
-          <p:nvPr/>
-        </p:nvSpPr>
-        <p:spPr>
-          <a:xfrm>
-            <a:off x="11274552" y="6547104"/>
-            <a:ext cx="868680" cy="256032"/>
-          </a:xfrm>
-          <a:prstGeom prst="rect">
-            <a:avLst/>
-          </a:prstGeom>
-          <a:noFill/>
-        </p:spPr>
-        <p:txBody>
-          <a:bodyPr wrap="none" lIns="0" rIns="0" tIns="0" bIns="0">
-            <a:spAutoFit/>
-          </a:bodyPr>
-          <a:lstStyle/>
-          <a:p>
-            <a:pPr algn="r">
-              <a:lnSpc>
-                <a:spcPct val="100000"/>
-              </a:lnSpc>
-            </a:pPr>
-            <a:r>
-              <a:rPr sz="1000" i="1">
-                <a:solidFill>
-                  <a:srgbClr val="5B6678"/>
-                </a:solidFill>
-                <a:latin typeface="Arial"/>
-              </a:rPr>
-              <a:t>11 / 40</a:t>
-            </a:r>
-          </a:p>
-        </p:txBody>
-      </p:sp>
     </p:spTree>
   </p:cSld>
   <p:clrMapOvr>
@@ -11479,45 +11362,6 @@
                 <a:latin typeface="Arial"/>
               </a:rPr>
               <a:t>A compact form of the whole section: role ≠ accuracy, structure helps separate inputs, CoT is a targeted tool, context is minimal. For big architectural decisions (RAG / FT / agent) — the eight-step checklist of Section 5.</a:t>
-            </a:r>
-          </a:p>
-        </p:txBody>
-      </p:sp>
-      <p:sp>
-        <p:nvSpPr>
-          <p:cNvPr id="46" name="TextBox 45"/>
-          <p:cNvSpPr txBox="1"/>
-          <p:nvPr/>
-        </p:nvSpPr>
-        <p:spPr>
-          <a:xfrm>
-            <a:off x="11274552" y="6547104"/>
-            <a:ext cx="868680" cy="256032"/>
-          </a:xfrm>
-          <a:prstGeom prst="rect">
-            <a:avLst/>
-          </a:prstGeom>
-          <a:noFill/>
-        </p:spPr>
-        <p:txBody>
-          <a:bodyPr wrap="none" lIns="0" rIns="0" tIns="0" bIns="0">
-            <a:spAutoFit/>
-          </a:bodyPr>
-          <a:lstStyle/>
-          <a:p>
-            <a:pPr algn="r">
-              <a:lnSpc>
-                <a:spcPct val="100000"/>
-              </a:lnSpc>
-            </a:pPr>
-            <a:r>
-              <a:rPr sz="1000" i="1">
-                <a:solidFill>
-                  <a:srgbClr val="5B6678"/>
-                </a:solidFill>
-                <a:latin typeface="Arial"/>
-              </a:rPr>
-              <a:t>12 / 40</a:t>
             </a:r>
           </a:p>
         </p:txBody>
@@ -12504,45 +12348,6 @@
           </a:p>
         </p:txBody>
       </p:sp>
-      <p:sp>
-        <p:nvSpPr>
-          <p:cNvPr id="25" name="TextBox 24"/>
-          <p:cNvSpPr txBox="1"/>
-          <p:nvPr/>
-        </p:nvSpPr>
-        <p:spPr>
-          <a:xfrm>
-            <a:off x="11274552" y="6547104"/>
-            <a:ext cx="868680" cy="256032"/>
-          </a:xfrm>
-          <a:prstGeom prst="rect">
-            <a:avLst/>
-          </a:prstGeom>
-          <a:noFill/>
-        </p:spPr>
-        <p:txBody>
-          <a:bodyPr wrap="none" lIns="0" rIns="0" tIns="0" bIns="0">
-            <a:spAutoFit/>
-          </a:bodyPr>
-          <a:lstStyle/>
-          <a:p>
-            <a:pPr algn="r">
-              <a:lnSpc>
-                <a:spcPct val="100000"/>
-              </a:lnSpc>
-            </a:pPr>
-            <a:r>
-              <a:rPr sz="1000" i="1">
-                <a:solidFill>
-                  <a:srgbClr val="5B6678"/>
-                </a:solidFill>
-                <a:latin typeface="Arial"/>
-              </a:rPr>
-              <a:t>13 / 40</a:t>
-            </a:r>
-          </a:p>
-        </p:txBody>
-      </p:sp>
     </p:spTree>
   </p:cSld>
   <p:clrMapOvr>
@@ -13702,45 +13507,6 @@
           </a:p>
         </p:txBody>
       </p:sp>
-      <p:sp>
-        <p:nvSpPr>
-          <p:cNvPr id="30" name="TextBox 29"/>
-          <p:cNvSpPr txBox="1"/>
-          <p:nvPr/>
-        </p:nvSpPr>
-        <p:spPr>
-          <a:xfrm>
-            <a:off x="11274552" y="6547104"/>
-            <a:ext cx="868680" cy="256032"/>
-          </a:xfrm>
-          <a:prstGeom prst="rect">
-            <a:avLst/>
-          </a:prstGeom>
-          <a:noFill/>
-        </p:spPr>
-        <p:txBody>
-          <a:bodyPr wrap="none" lIns="0" rIns="0" tIns="0" bIns="0">
-            <a:spAutoFit/>
-          </a:bodyPr>
-          <a:lstStyle/>
-          <a:p>
-            <a:pPr algn="r">
-              <a:lnSpc>
-                <a:spcPct val="100000"/>
-              </a:lnSpc>
-            </a:pPr>
-            <a:r>
-              <a:rPr sz="1000" i="1">
-                <a:solidFill>
-                  <a:srgbClr val="5B6678"/>
-                </a:solidFill>
-                <a:latin typeface="Arial"/>
-              </a:rPr>
-              <a:t>14 / 40</a:t>
-            </a:r>
-          </a:p>
-        </p:txBody>
-      </p:sp>
     </p:spTree>
   </p:cSld>
   <p:clrMapOvr>
@@ -14699,45 +14465,6 @@
           </a:p>
         </p:txBody>
       </p:sp>
-      <p:sp>
-        <p:nvSpPr>
-          <p:cNvPr id="23" name="TextBox 22"/>
-          <p:cNvSpPr txBox="1"/>
-          <p:nvPr/>
-        </p:nvSpPr>
-        <p:spPr>
-          <a:xfrm>
-            <a:off x="11274552" y="6547104"/>
-            <a:ext cx="868680" cy="256032"/>
-          </a:xfrm>
-          <a:prstGeom prst="rect">
-            <a:avLst/>
-          </a:prstGeom>
-          <a:noFill/>
-        </p:spPr>
-        <p:txBody>
-          <a:bodyPr wrap="none" lIns="0" rIns="0" tIns="0" bIns="0">
-            <a:spAutoFit/>
-          </a:bodyPr>
-          <a:lstStyle/>
-          <a:p>
-            <a:pPr algn="r">
-              <a:lnSpc>
-                <a:spcPct val="100000"/>
-              </a:lnSpc>
-            </a:pPr>
-            <a:r>
-              <a:rPr sz="1000" i="1">
-                <a:solidFill>
-                  <a:srgbClr val="5B6678"/>
-                </a:solidFill>
-                <a:latin typeface="Arial"/>
-              </a:rPr>
-              <a:t>15 / 40</a:t>
-            </a:r>
-          </a:p>
-        </p:txBody>
-      </p:sp>
     </p:spTree>
   </p:cSld>
   <p:clrMapOvr>
@@ -15847,45 +15574,6 @@
           </a:p>
         </p:txBody>
       </p:sp>
-      <p:sp>
-        <p:nvSpPr>
-          <p:cNvPr id="28" name="TextBox 27"/>
-          <p:cNvSpPr txBox="1"/>
-          <p:nvPr/>
-        </p:nvSpPr>
-        <p:spPr>
-          <a:xfrm>
-            <a:off x="11274552" y="6547104"/>
-            <a:ext cx="868680" cy="256032"/>
-          </a:xfrm>
-          <a:prstGeom prst="rect">
-            <a:avLst/>
-          </a:prstGeom>
-          <a:noFill/>
-        </p:spPr>
-        <p:txBody>
-          <a:bodyPr wrap="none" lIns="0" rIns="0" tIns="0" bIns="0">
-            <a:spAutoFit/>
-          </a:bodyPr>
-          <a:lstStyle/>
-          <a:p>
-            <a:pPr algn="r">
-              <a:lnSpc>
-                <a:spcPct val="100000"/>
-              </a:lnSpc>
-            </a:pPr>
-            <a:r>
-              <a:rPr sz="1000" i="1">
-                <a:solidFill>
-                  <a:srgbClr val="5B6678"/>
-                </a:solidFill>
-                <a:latin typeface="Arial"/>
-              </a:rPr>
-              <a:t>16 / 40</a:t>
-            </a:r>
-          </a:p>
-        </p:txBody>
-      </p:sp>
     </p:spTree>
   </p:cSld>
   <p:clrMapOvr>
@@ -16875,45 +16563,6 @@
                 <a:latin typeface="Arial"/>
               </a:rPr>
               <a:t>   ·   Documented failure classes (Barnett et al. 2024; Air Canada — McCarthy Tétrault 2024). Cases are illustrative.</a:t>
-            </a:r>
-          </a:p>
-        </p:txBody>
-      </p:sp>
-      <p:sp>
-        <p:nvSpPr>
-          <p:cNvPr id="25" name="TextBox 24"/>
-          <p:cNvSpPr txBox="1"/>
-          <p:nvPr/>
-        </p:nvSpPr>
-        <p:spPr>
-          <a:xfrm>
-            <a:off x="11274552" y="6547104"/>
-            <a:ext cx="868680" cy="256032"/>
-          </a:xfrm>
-          <a:prstGeom prst="rect">
-            <a:avLst/>
-          </a:prstGeom>
-          <a:noFill/>
-        </p:spPr>
-        <p:txBody>
-          <a:bodyPr wrap="none" lIns="0" rIns="0" tIns="0" bIns="0">
-            <a:spAutoFit/>
-          </a:bodyPr>
-          <a:lstStyle/>
-          <a:p>
-            <a:pPr algn="r">
-              <a:lnSpc>
-                <a:spcPct val="100000"/>
-              </a:lnSpc>
-            </a:pPr>
-            <a:r>
-              <a:rPr sz="1000" i="1">
-                <a:solidFill>
-                  <a:srgbClr val="5B6678"/>
-                </a:solidFill>
-                <a:latin typeface="Arial"/>
-              </a:rPr>
-              <a:t>17 / 40</a:t>
             </a:r>
           </a:p>
         </p:txBody>
@@ -17900,45 +17549,6 @@
           </a:p>
         </p:txBody>
       </p:sp>
-      <p:sp>
-        <p:nvSpPr>
-          <p:cNvPr id="25" name="TextBox 24"/>
-          <p:cNvSpPr txBox="1"/>
-          <p:nvPr/>
-        </p:nvSpPr>
-        <p:spPr>
-          <a:xfrm>
-            <a:off x="11274552" y="6547104"/>
-            <a:ext cx="868680" cy="256032"/>
-          </a:xfrm>
-          <a:prstGeom prst="rect">
-            <a:avLst/>
-          </a:prstGeom>
-          <a:noFill/>
-        </p:spPr>
-        <p:txBody>
-          <a:bodyPr wrap="none" lIns="0" rIns="0" tIns="0" bIns="0">
-            <a:spAutoFit/>
-          </a:bodyPr>
-          <a:lstStyle/>
-          <a:p>
-            <a:pPr algn="r">
-              <a:lnSpc>
-                <a:spcPct val="100000"/>
-              </a:lnSpc>
-            </a:pPr>
-            <a:r>
-              <a:rPr sz="1000" i="1">
-                <a:solidFill>
-                  <a:srgbClr val="5B6678"/>
-                </a:solidFill>
-                <a:latin typeface="Arial"/>
-              </a:rPr>
-              <a:t>18 / 40</a:t>
-            </a:r>
-          </a:p>
-        </p:txBody>
-      </p:sp>
     </p:spTree>
   </p:cSld>
   <p:clrMapOvr>
@@ -19064,45 +18674,6 @@
                 <a:hlinkClick r:id="rId6"/>
               </a:rPr>
               <a:t>IBM — RAG vs Fine-Tuning (fine-tuning changes the weights)</a:t>
-            </a:r>
-          </a:p>
-        </p:txBody>
-      </p:sp>
-      <p:sp>
-        <p:nvSpPr>
-          <p:cNvPr id="29" name="TextBox 28"/>
-          <p:cNvSpPr txBox="1"/>
-          <p:nvPr/>
-        </p:nvSpPr>
-        <p:spPr>
-          <a:xfrm>
-            <a:off x="11274552" y="6547104"/>
-            <a:ext cx="868680" cy="256032"/>
-          </a:xfrm>
-          <a:prstGeom prst="rect">
-            <a:avLst/>
-          </a:prstGeom>
-          <a:noFill/>
-        </p:spPr>
-        <p:txBody>
-          <a:bodyPr wrap="none" lIns="0" rIns="0" tIns="0" bIns="0">
-            <a:spAutoFit/>
-          </a:bodyPr>
-          <a:lstStyle/>
-          <a:p>
-            <a:pPr algn="r">
-              <a:lnSpc>
-                <a:spcPct val="100000"/>
-              </a:lnSpc>
-            </a:pPr>
-            <a:r>
-              <a:rPr sz="1000" i="1">
-                <a:solidFill>
-                  <a:srgbClr val="5B6678"/>
-                </a:solidFill>
-                <a:latin typeface="Arial"/>
-              </a:rPr>
-              <a:t>19 / 40</a:t>
             </a:r>
           </a:p>
         </p:txBody>
@@ -19418,45 +18989,6 @@
           </a:p>
         </p:txBody>
       </p:sp>
-      <p:sp>
-        <p:nvSpPr>
-          <p:cNvPr id="9" name="TextBox 8"/>
-          <p:cNvSpPr txBox="1"/>
-          <p:nvPr/>
-        </p:nvSpPr>
-        <p:spPr>
-          <a:xfrm>
-            <a:off x="11274552" y="6547104"/>
-            <a:ext cx="868680" cy="256032"/>
-          </a:xfrm>
-          <a:prstGeom prst="rect">
-            <a:avLst/>
-          </a:prstGeom>
-          <a:noFill/>
-        </p:spPr>
-        <p:txBody>
-          <a:bodyPr wrap="none" lIns="0" rIns="0" tIns="0" bIns="0">
-            <a:spAutoFit/>
-          </a:bodyPr>
-          <a:lstStyle/>
-          <a:p>
-            <a:pPr algn="r">
-              <a:lnSpc>
-                <a:spcPct val="100000"/>
-              </a:lnSpc>
-            </a:pPr>
-            <a:r>
-              <a:rPr sz="1000" i="1">
-                <a:solidFill>
-                  <a:srgbClr val="5B6678"/>
-                </a:solidFill>
-                <a:latin typeface="Arial"/>
-              </a:rPr>
-              <a:t>2 / 40</a:t>
-            </a:r>
-          </a:p>
-        </p:txBody>
-      </p:sp>
     </p:spTree>
   </p:cSld>
   <p:clrMapOvr>
@@ -20728,45 +20260,6 @@
           </a:p>
         </p:txBody>
       </p:sp>
-      <p:sp>
-        <p:nvSpPr>
-          <p:cNvPr id="29" name="TextBox 28"/>
-          <p:cNvSpPr txBox="1"/>
-          <p:nvPr/>
-        </p:nvSpPr>
-        <p:spPr>
-          <a:xfrm>
-            <a:off x="11274552" y="6547104"/>
-            <a:ext cx="868680" cy="256032"/>
-          </a:xfrm>
-          <a:prstGeom prst="rect">
-            <a:avLst/>
-          </a:prstGeom>
-          <a:noFill/>
-        </p:spPr>
-        <p:txBody>
-          <a:bodyPr wrap="none" lIns="0" rIns="0" tIns="0" bIns="0">
-            <a:spAutoFit/>
-          </a:bodyPr>
-          <a:lstStyle/>
-          <a:p>
-            <a:pPr algn="r">
-              <a:lnSpc>
-                <a:spcPct val="100000"/>
-              </a:lnSpc>
-            </a:pPr>
-            <a:r>
-              <a:rPr sz="1000" i="1">
-                <a:solidFill>
-                  <a:srgbClr val="5B6678"/>
-                </a:solidFill>
-                <a:latin typeface="Arial"/>
-              </a:rPr>
-              <a:t>20 / 40</a:t>
-            </a:r>
-          </a:p>
-        </p:txBody>
-      </p:sp>
     </p:spTree>
   </p:cSld>
   <p:clrMapOvr>
@@ -22677,45 +22170,6 @@
           </a:p>
         </p:txBody>
       </p:sp>
-      <p:sp>
-        <p:nvSpPr>
-          <p:cNvPr id="45" name="TextBox 44"/>
-          <p:cNvSpPr txBox="1"/>
-          <p:nvPr/>
-        </p:nvSpPr>
-        <p:spPr>
-          <a:xfrm>
-            <a:off x="11274552" y="6547104"/>
-            <a:ext cx="868680" cy="256032"/>
-          </a:xfrm>
-          <a:prstGeom prst="rect">
-            <a:avLst/>
-          </a:prstGeom>
-          <a:noFill/>
-        </p:spPr>
-        <p:txBody>
-          <a:bodyPr wrap="none" lIns="0" rIns="0" tIns="0" bIns="0">
-            <a:spAutoFit/>
-          </a:bodyPr>
-          <a:lstStyle/>
-          <a:p>
-            <a:pPr algn="r">
-              <a:lnSpc>
-                <a:spcPct val="100000"/>
-              </a:lnSpc>
-            </a:pPr>
-            <a:r>
-              <a:rPr sz="1000" i="1">
-                <a:solidFill>
-                  <a:srgbClr val="5B6678"/>
-                </a:solidFill>
-                <a:latin typeface="Arial"/>
-              </a:rPr>
-              <a:t>21 / 40</a:t>
-            </a:r>
-          </a:p>
-        </p:txBody>
-      </p:sp>
     </p:spTree>
   </p:cSld>
   <p:clrMapOvr>
@@ -23173,45 +22627,6 @@
                 <a:latin typeface="Arial"/>
               </a:rPr>
               <a:t>   ·   Empirically observed under continual fine-tuning (Luo et al. 2023). Mechanisms — “research suggests” (preprint).</a:t>
-            </a:r>
-          </a:p>
-        </p:txBody>
-      </p:sp>
-      <p:sp>
-        <p:nvSpPr>
-          <p:cNvPr id="12" name="TextBox 11"/>
-          <p:cNvSpPr txBox="1"/>
-          <p:nvPr/>
-        </p:nvSpPr>
-        <p:spPr>
-          <a:xfrm>
-            <a:off x="11274552" y="6547104"/>
-            <a:ext cx="868680" cy="256032"/>
-          </a:xfrm>
-          <a:prstGeom prst="rect">
-            <a:avLst/>
-          </a:prstGeom>
-          <a:noFill/>
-        </p:spPr>
-        <p:txBody>
-          <a:bodyPr wrap="none" lIns="0" rIns="0" tIns="0" bIns="0">
-            <a:spAutoFit/>
-          </a:bodyPr>
-          <a:lstStyle/>
-          <a:p>
-            <a:pPr algn="r">
-              <a:lnSpc>
-                <a:spcPct val="100000"/>
-              </a:lnSpc>
-            </a:pPr>
-            <a:r>
-              <a:rPr sz="1000" i="1">
-                <a:solidFill>
-                  <a:srgbClr val="5B6678"/>
-                </a:solidFill>
-                <a:latin typeface="Arial"/>
-              </a:rPr>
-              <a:t>22 / 40</a:t>
             </a:r>
           </a:p>
         </p:txBody>
@@ -24198,45 +23613,6 @@
           </a:p>
         </p:txBody>
       </p:sp>
-      <p:sp>
-        <p:nvSpPr>
-          <p:cNvPr id="25" name="TextBox 24"/>
-          <p:cNvSpPr txBox="1"/>
-          <p:nvPr/>
-        </p:nvSpPr>
-        <p:spPr>
-          <a:xfrm>
-            <a:off x="11274552" y="6547104"/>
-            <a:ext cx="868680" cy="256032"/>
-          </a:xfrm>
-          <a:prstGeom prst="rect">
-            <a:avLst/>
-          </a:prstGeom>
-          <a:noFill/>
-        </p:spPr>
-        <p:txBody>
-          <a:bodyPr wrap="none" lIns="0" rIns="0" tIns="0" bIns="0">
-            <a:spAutoFit/>
-          </a:bodyPr>
-          <a:lstStyle/>
-          <a:p>
-            <a:pPr algn="r">
-              <a:lnSpc>
-                <a:spcPct val="100000"/>
-              </a:lnSpc>
-            </a:pPr>
-            <a:r>
-              <a:rPr sz="1000" i="1">
-                <a:solidFill>
-                  <a:srgbClr val="5B6678"/>
-                </a:solidFill>
-                <a:latin typeface="Arial"/>
-              </a:rPr>
-              <a:t>23 / 40</a:t>
-            </a:r>
-          </a:p>
-        </p:txBody>
-      </p:sp>
     </p:spTree>
   </p:cSld>
   <p:clrMapOvr>
@@ -26056,45 +25432,6 @@
           </a:p>
         </p:txBody>
       </p:sp>
-      <p:sp>
-        <p:nvSpPr>
-          <p:cNvPr id="46" name="TextBox 45"/>
-          <p:cNvSpPr txBox="1"/>
-          <p:nvPr/>
-        </p:nvSpPr>
-        <p:spPr>
-          <a:xfrm>
-            <a:off x="11274552" y="6547104"/>
-            <a:ext cx="868680" cy="256032"/>
-          </a:xfrm>
-          <a:prstGeom prst="rect">
-            <a:avLst/>
-          </a:prstGeom>
-          <a:noFill/>
-        </p:spPr>
-        <p:txBody>
-          <a:bodyPr wrap="none" lIns="0" rIns="0" tIns="0" bIns="0">
-            <a:spAutoFit/>
-          </a:bodyPr>
-          <a:lstStyle/>
-          <a:p>
-            <a:pPr algn="r">
-              <a:lnSpc>
-                <a:spcPct val="100000"/>
-              </a:lnSpc>
-            </a:pPr>
-            <a:r>
-              <a:rPr sz="1000" i="1">
-                <a:solidFill>
-                  <a:srgbClr val="5B6678"/>
-                </a:solidFill>
-                <a:latin typeface="Arial"/>
-              </a:rPr>
-              <a:t>24 / 40</a:t>
-            </a:r>
-          </a:p>
-        </p:txBody>
-      </p:sp>
     </p:spTree>
   </p:cSld>
   <p:clrMapOvr>
@@ -27896,45 +27233,6 @@
           </a:p>
         </p:txBody>
       </p:sp>
-      <p:sp>
-        <p:nvSpPr>
-          <p:cNvPr id="42" name="TextBox 41"/>
-          <p:cNvSpPr txBox="1"/>
-          <p:nvPr/>
-        </p:nvSpPr>
-        <p:spPr>
-          <a:xfrm>
-            <a:off x="11274552" y="6547104"/>
-            <a:ext cx="868680" cy="256032"/>
-          </a:xfrm>
-          <a:prstGeom prst="rect">
-            <a:avLst/>
-          </a:prstGeom>
-          <a:noFill/>
-        </p:spPr>
-        <p:txBody>
-          <a:bodyPr wrap="none" lIns="0" rIns="0" tIns="0" bIns="0">
-            <a:spAutoFit/>
-          </a:bodyPr>
-          <a:lstStyle/>
-          <a:p>
-            <a:pPr algn="r">
-              <a:lnSpc>
-                <a:spcPct val="100000"/>
-              </a:lnSpc>
-            </a:pPr>
-            <a:r>
-              <a:rPr sz="1000" i="1">
-                <a:solidFill>
-                  <a:srgbClr val="5B6678"/>
-                </a:solidFill>
-                <a:latin typeface="Arial"/>
-              </a:rPr>
-              <a:t>25 / 40</a:t>
-            </a:r>
-          </a:p>
-        </p:txBody>
-      </p:sp>
     </p:spTree>
   </p:cSld>
   <p:clrMapOvr>
@@ -29211,45 +28509,6 @@
           </a:p>
         </p:txBody>
       </p:sp>
-      <p:sp>
-        <p:nvSpPr>
-          <p:cNvPr id="31" name="TextBox 30"/>
-          <p:cNvSpPr txBox="1"/>
-          <p:nvPr/>
-        </p:nvSpPr>
-        <p:spPr>
-          <a:xfrm>
-            <a:off x="11274552" y="6547104"/>
-            <a:ext cx="868680" cy="256032"/>
-          </a:xfrm>
-          <a:prstGeom prst="rect">
-            <a:avLst/>
-          </a:prstGeom>
-          <a:noFill/>
-        </p:spPr>
-        <p:txBody>
-          <a:bodyPr wrap="none" lIns="0" rIns="0" tIns="0" bIns="0">
-            <a:spAutoFit/>
-          </a:bodyPr>
-          <a:lstStyle/>
-          <a:p>
-            <a:pPr algn="r">
-              <a:lnSpc>
-                <a:spcPct val="100000"/>
-              </a:lnSpc>
-            </a:pPr>
-            <a:r>
-              <a:rPr sz="1000" i="1">
-                <a:solidFill>
-                  <a:srgbClr val="5B6678"/>
-                </a:solidFill>
-                <a:latin typeface="Arial"/>
-              </a:rPr>
-              <a:t>26 / 40</a:t>
-            </a:r>
-          </a:p>
-        </p:txBody>
-      </p:sp>
     </p:spTree>
   </p:cSld>
   <p:clrMapOvr>
@@ -30898,45 +30157,6 @@
           </a:p>
         </p:txBody>
       </p:sp>
-      <p:sp>
-        <p:nvSpPr>
-          <p:cNvPr id="42" name="TextBox 41"/>
-          <p:cNvSpPr txBox="1"/>
-          <p:nvPr/>
-        </p:nvSpPr>
-        <p:spPr>
-          <a:xfrm>
-            <a:off x="11274552" y="6547104"/>
-            <a:ext cx="868680" cy="256032"/>
-          </a:xfrm>
-          <a:prstGeom prst="rect">
-            <a:avLst/>
-          </a:prstGeom>
-          <a:noFill/>
-        </p:spPr>
-        <p:txBody>
-          <a:bodyPr wrap="none" lIns="0" rIns="0" tIns="0" bIns="0">
-            <a:spAutoFit/>
-          </a:bodyPr>
-          <a:lstStyle/>
-          <a:p>
-            <a:pPr algn="r">
-              <a:lnSpc>
-                <a:spcPct val="100000"/>
-              </a:lnSpc>
-            </a:pPr>
-            <a:r>
-              <a:rPr sz="1000" i="1">
-                <a:solidFill>
-                  <a:srgbClr val="5B6678"/>
-                </a:solidFill>
-                <a:latin typeface="Arial"/>
-              </a:rPr>
-              <a:t>27 / 40</a:t>
-            </a:r>
-          </a:p>
-        </p:txBody>
-      </p:sp>
     </p:spTree>
   </p:cSld>
   <p:clrMapOvr>
@@ -31753,45 +30973,6 @@
           </a:p>
         </p:txBody>
       </p:sp>
-      <p:sp>
-        <p:nvSpPr>
-          <p:cNvPr id="21" name="TextBox 20"/>
-          <p:cNvSpPr txBox="1"/>
-          <p:nvPr/>
-        </p:nvSpPr>
-        <p:spPr>
-          <a:xfrm>
-            <a:off x="11274552" y="6547104"/>
-            <a:ext cx="868680" cy="256032"/>
-          </a:xfrm>
-          <a:prstGeom prst="rect">
-            <a:avLst/>
-          </a:prstGeom>
-          <a:noFill/>
-        </p:spPr>
-        <p:txBody>
-          <a:bodyPr wrap="none" lIns="0" rIns="0" tIns="0" bIns="0">
-            <a:spAutoFit/>
-          </a:bodyPr>
-          <a:lstStyle/>
-          <a:p>
-            <a:pPr algn="r">
-              <a:lnSpc>
-                <a:spcPct val="100000"/>
-              </a:lnSpc>
-            </a:pPr>
-            <a:r>
-              <a:rPr sz="1000" i="1">
-                <a:solidFill>
-                  <a:srgbClr val="5B6678"/>
-                </a:solidFill>
-                <a:latin typeface="Arial"/>
-              </a:rPr>
-              <a:t>28 / 40</a:t>
-            </a:r>
-          </a:p>
-        </p:txBody>
-      </p:sp>
     </p:spTree>
   </p:cSld>
   <p:clrMapOvr>
@@ -33230,45 +32411,6 @@
           </a:p>
         </p:txBody>
       </p:sp>
-      <p:sp>
-        <p:nvSpPr>
-          <p:cNvPr id="36" name="TextBox 35"/>
-          <p:cNvSpPr txBox="1"/>
-          <p:nvPr/>
-        </p:nvSpPr>
-        <p:spPr>
-          <a:xfrm>
-            <a:off x="11274552" y="6547104"/>
-            <a:ext cx="868680" cy="256032"/>
-          </a:xfrm>
-          <a:prstGeom prst="rect">
-            <a:avLst/>
-          </a:prstGeom>
-          <a:noFill/>
-        </p:spPr>
-        <p:txBody>
-          <a:bodyPr wrap="none" lIns="0" rIns="0" tIns="0" bIns="0">
-            <a:spAutoFit/>
-          </a:bodyPr>
-          <a:lstStyle/>
-          <a:p>
-            <a:pPr algn="r">
-              <a:lnSpc>
-                <a:spcPct val="100000"/>
-              </a:lnSpc>
-            </a:pPr>
-            <a:r>
-              <a:rPr sz="1000" i="1">
-                <a:solidFill>
-                  <a:srgbClr val="5B6678"/>
-                </a:solidFill>
-                <a:latin typeface="Arial"/>
-              </a:rPr>
-              <a:t>29 / 40</a:t>
-            </a:r>
-          </a:p>
-        </p:txBody>
-      </p:sp>
     </p:spTree>
   </p:cSld>
   <p:clrMapOvr>
@@ -34763,45 +33905,6 @@
           </a:p>
         </p:txBody>
       </p:sp>
-      <p:sp>
-        <p:nvSpPr>
-          <p:cNvPr id="40" name="TextBox 39"/>
-          <p:cNvSpPr txBox="1"/>
-          <p:nvPr/>
-        </p:nvSpPr>
-        <p:spPr>
-          <a:xfrm>
-            <a:off x="11274552" y="6547104"/>
-            <a:ext cx="868680" cy="256032"/>
-          </a:xfrm>
-          <a:prstGeom prst="rect">
-            <a:avLst/>
-          </a:prstGeom>
-          <a:noFill/>
-        </p:spPr>
-        <p:txBody>
-          <a:bodyPr wrap="none" lIns="0" rIns="0" tIns="0" bIns="0">
-            <a:spAutoFit/>
-          </a:bodyPr>
-          <a:lstStyle/>
-          <a:p>
-            <a:pPr algn="r">
-              <a:lnSpc>
-                <a:spcPct val="100000"/>
-              </a:lnSpc>
-            </a:pPr>
-            <a:r>
-              <a:rPr sz="1000" i="1">
-                <a:solidFill>
-                  <a:srgbClr val="5B6678"/>
-                </a:solidFill>
-                <a:latin typeface="Arial"/>
-              </a:rPr>
-              <a:t>3 / 40</a:t>
-            </a:r>
-          </a:p>
-        </p:txBody>
-      </p:sp>
     </p:spTree>
   </p:cSld>
   <p:clrMapOvr>
@@ -35817,45 +34920,6 @@
           </a:p>
         </p:txBody>
       </p:sp>
-      <p:sp>
-        <p:nvSpPr>
-          <p:cNvPr id="25" name="TextBox 24"/>
-          <p:cNvSpPr txBox="1"/>
-          <p:nvPr/>
-        </p:nvSpPr>
-        <p:spPr>
-          <a:xfrm>
-            <a:off x="11274552" y="6547104"/>
-            <a:ext cx="868680" cy="256032"/>
-          </a:xfrm>
-          <a:prstGeom prst="rect">
-            <a:avLst/>
-          </a:prstGeom>
-          <a:noFill/>
-        </p:spPr>
-        <p:txBody>
-          <a:bodyPr wrap="none" lIns="0" rIns="0" tIns="0" bIns="0">
-            <a:spAutoFit/>
-          </a:bodyPr>
-          <a:lstStyle/>
-          <a:p>
-            <a:pPr algn="r">
-              <a:lnSpc>
-                <a:spcPct val="100000"/>
-              </a:lnSpc>
-            </a:pPr>
-            <a:r>
-              <a:rPr sz="1000" i="1">
-                <a:solidFill>
-                  <a:srgbClr val="5B6678"/>
-                </a:solidFill>
-                <a:latin typeface="Arial"/>
-              </a:rPr>
-              <a:t>30 / 40</a:t>
-            </a:r>
-          </a:p>
-        </p:txBody>
-      </p:sp>
     </p:spTree>
   </p:cSld>
   <p:clrMapOvr>
@@ -37577,45 +36641,6 @@
           </a:p>
         </p:txBody>
       </p:sp>
-      <p:sp>
-        <p:nvSpPr>
-          <p:cNvPr id="41" name="TextBox 40"/>
-          <p:cNvSpPr txBox="1"/>
-          <p:nvPr/>
-        </p:nvSpPr>
-        <p:spPr>
-          <a:xfrm>
-            <a:off x="11274552" y="6547104"/>
-            <a:ext cx="868680" cy="256032"/>
-          </a:xfrm>
-          <a:prstGeom prst="rect">
-            <a:avLst/>
-          </a:prstGeom>
-          <a:noFill/>
-        </p:spPr>
-        <p:txBody>
-          <a:bodyPr wrap="none" lIns="0" rIns="0" tIns="0" bIns="0">
-            <a:spAutoFit/>
-          </a:bodyPr>
-          <a:lstStyle/>
-          <a:p>
-            <a:pPr algn="r">
-              <a:lnSpc>
-                <a:spcPct val="100000"/>
-              </a:lnSpc>
-            </a:pPr>
-            <a:r>
-              <a:rPr sz="1000" i="1">
-                <a:solidFill>
-                  <a:srgbClr val="5B6678"/>
-                </a:solidFill>
-                <a:latin typeface="Arial"/>
-              </a:rPr>
-              <a:t>31 / 40</a:t>
-            </a:r>
-          </a:p>
-        </p:txBody>
-      </p:sp>
     </p:spTree>
   </p:cSld>
   <p:clrMapOvr>
@@ -38973,45 +37998,6 @@
           </a:p>
         </p:txBody>
       </p:sp>
-      <p:sp>
-        <p:nvSpPr>
-          <p:cNvPr id="35" name="TextBox 34"/>
-          <p:cNvSpPr txBox="1"/>
-          <p:nvPr/>
-        </p:nvSpPr>
-        <p:spPr>
-          <a:xfrm>
-            <a:off x="11274552" y="6547104"/>
-            <a:ext cx="868680" cy="256032"/>
-          </a:xfrm>
-          <a:prstGeom prst="rect">
-            <a:avLst/>
-          </a:prstGeom>
-          <a:noFill/>
-        </p:spPr>
-        <p:txBody>
-          <a:bodyPr wrap="none" lIns="0" rIns="0" tIns="0" bIns="0">
-            <a:spAutoFit/>
-          </a:bodyPr>
-          <a:lstStyle/>
-          <a:p>
-            <a:pPr algn="r">
-              <a:lnSpc>
-                <a:spcPct val="100000"/>
-              </a:lnSpc>
-            </a:pPr>
-            <a:r>
-              <a:rPr sz="1000" i="1">
-                <a:solidFill>
-                  <a:srgbClr val="5B6678"/>
-                </a:solidFill>
-                <a:latin typeface="Arial"/>
-              </a:rPr>
-              <a:t>32 / 40</a:t>
-            </a:r>
-          </a:p>
-        </p:txBody>
-      </p:sp>
     </p:spTree>
   </p:cSld>
   <p:clrMapOvr>
@@ -39966,45 +38952,6 @@
                 <a:latin typeface="Arial"/>
               </a:rPr>
               <a:t>   ·   Attacks through tools (prompt injection, the GitHub MCP heist) — the 4th class of failures, covered on the security slide. The $4,200 loop — a single-author postmortem 2026-04 (illustrative); compounding — MindStudio 2025–2026.</a:t>
-            </a:r>
-          </a:p>
-        </p:txBody>
-      </p:sp>
-      <p:sp>
-        <p:nvSpPr>
-          <p:cNvPr id="23" name="TextBox 22"/>
-          <p:cNvSpPr txBox="1"/>
-          <p:nvPr/>
-        </p:nvSpPr>
-        <p:spPr>
-          <a:xfrm>
-            <a:off x="11274552" y="6547104"/>
-            <a:ext cx="868680" cy="256032"/>
-          </a:xfrm>
-          <a:prstGeom prst="rect">
-            <a:avLst/>
-          </a:prstGeom>
-          <a:noFill/>
-        </p:spPr>
-        <p:txBody>
-          <a:bodyPr wrap="none" lIns="0" rIns="0" tIns="0" bIns="0">
-            <a:spAutoFit/>
-          </a:bodyPr>
-          <a:lstStyle/>
-          <a:p>
-            <a:pPr algn="r">
-              <a:lnSpc>
-                <a:spcPct val="100000"/>
-              </a:lnSpc>
-            </a:pPr>
-            <a:r>
-              <a:rPr sz="1000" i="1">
-                <a:solidFill>
-                  <a:srgbClr val="5B6678"/>
-                </a:solidFill>
-                <a:latin typeface="Arial"/>
-              </a:rPr>
-              <a:t>33 / 40</a:t>
             </a:r>
           </a:p>
         </p:txBody>
@@ -40991,45 +39938,6 @@
           </a:p>
         </p:txBody>
       </p:sp>
-      <p:sp>
-        <p:nvSpPr>
-          <p:cNvPr id="25" name="TextBox 24"/>
-          <p:cNvSpPr txBox="1"/>
-          <p:nvPr/>
-        </p:nvSpPr>
-        <p:spPr>
-          <a:xfrm>
-            <a:off x="11274552" y="6547104"/>
-            <a:ext cx="868680" cy="256032"/>
-          </a:xfrm>
-          <a:prstGeom prst="rect">
-            <a:avLst/>
-          </a:prstGeom>
-          <a:noFill/>
-        </p:spPr>
-        <p:txBody>
-          <a:bodyPr wrap="none" lIns="0" rIns="0" tIns="0" bIns="0">
-            <a:spAutoFit/>
-          </a:bodyPr>
-          <a:lstStyle/>
-          <a:p>
-            <a:pPr algn="r">
-              <a:lnSpc>
-                <a:spcPct val="100000"/>
-              </a:lnSpc>
-            </a:pPr>
-            <a:r>
-              <a:rPr sz="1000" i="1">
-                <a:solidFill>
-                  <a:srgbClr val="5B6678"/>
-                </a:solidFill>
-                <a:latin typeface="Arial"/>
-              </a:rPr>
-              <a:t>34 / 40</a:t>
-            </a:r>
-          </a:p>
-        </p:txBody>
-      </p:sp>
     </p:spTree>
   </p:cSld>
   <p:clrMapOvr>
@@ -42693,45 +41601,6 @@
           </a:p>
         </p:txBody>
       </p:sp>
-      <p:sp>
-        <p:nvSpPr>
-          <p:cNvPr id="41" name="TextBox 40"/>
-          <p:cNvSpPr txBox="1"/>
-          <p:nvPr/>
-        </p:nvSpPr>
-        <p:spPr>
-          <a:xfrm>
-            <a:off x="11274552" y="6547104"/>
-            <a:ext cx="868680" cy="256032"/>
-          </a:xfrm>
-          <a:prstGeom prst="rect">
-            <a:avLst/>
-          </a:prstGeom>
-          <a:noFill/>
-        </p:spPr>
-        <p:txBody>
-          <a:bodyPr wrap="none" lIns="0" rIns="0" tIns="0" bIns="0">
-            <a:spAutoFit/>
-          </a:bodyPr>
-          <a:lstStyle/>
-          <a:p>
-            <a:pPr algn="r">
-              <a:lnSpc>
-                <a:spcPct val="100000"/>
-              </a:lnSpc>
-            </a:pPr>
-            <a:r>
-              <a:rPr sz="1000" i="1">
-                <a:solidFill>
-                  <a:srgbClr val="5B6678"/>
-                </a:solidFill>
-                <a:latin typeface="Arial"/>
-              </a:rPr>
-              <a:t>35 / 40</a:t>
-            </a:r>
-          </a:p>
-        </p:txBody>
-      </p:sp>
     </p:spTree>
   </p:cSld>
   <p:clrMapOvr>
@@ -45716,45 +44585,6 @@
           </a:p>
         </p:txBody>
       </p:sp>
-      <p:sp>
-        <p:nvSpPr>
-          <p:cNvPr id="70" name="TextBox 69"/>
-          <p:cNvSpPr txBox="1"/>
-          <p:nvPr/>
-        </p:nvSpPr>
-        <p:spPr>
-          <a:xfrm>
-            <a:off x="11274552" y="6547104"/>
-            <a:ext cx="868680" cy="256032"/>
-          </a:xfrm>
-          <a:prstGeom prst="rect">
-            <a:avLst/>
-          </a:prstGeom>
-          <a:noFill/>
-        </p:spPr>
-        <p:txBody>
-          <a:bodyPr wrap="none" lIns="0" rIns="0" tIns="0" bIns="0">
-            <a:spAutoFit/>
-          </a:bodyPr>
-          <a:lstStyle/>
-          <a:p>
-            <a:pPr algn="r">
-              <a:lnSpc>
-                <a:spcPct val="100000"/>
-              </a:lnSpc>
-            </a:pPr>
-            <a:r>
-              <a:rPr sz="1000" i="1">
-                <a:solidFill>
-                  <a:srgbClr val="5B6678"/>
-                </a:solidFill>
-                <a:latin typeface="Arial"/>
-              </a:rPr>
-              <a:t>36 / 40</a:t>
-            </a:r>
-          </a:p>
-        </p:txBody>
-      </p:sp>
     </p:spTree>
   </p:cSld>
   <p:clrMapOvr>
@@ -46953,45 +45783,6 @@
           </a:p>
         </p:txBody>
       </p:sp>
-      <p:sp>
-        <p:nvSpPr>
-          <p:cNvPr id="32" name="TextBox 31"/>
-          <p:cNvSpPr txBox="1"/>
-          <p:nvPr/>
-        </p:nvSpPr>
-        <p:spPr>
-          <a:xfrm>
-            <a:off x="11274552" y="6547104"/>
-            <a:ext cx="868680" cy="256032"/>
-          </a:xfrm>
-          <a:prstGeom prst="rect">
-            <a:avLst/>
-          </a:prstGeom>
-          <a:noFill/>
-        </p:spPr>
-        <p:txBody>
-          <a:bodyPr wrap="none" lIns="0" rIns="0" tIns="0" bIns="0">
-            <a:spAutoFit/>
-          </a:bodyPr>
-          <a:lstStyle/>
-          <a:p>
-            <a:pPr algn="r">
-              <a:lnSpc>
-                <a:spcPct val="100000"/>
-              </a:lnSpc>
-            </a:pPr>
-            <a:r>
-              <a:rPr sz="1000" i="1">
-                <a:solidFill>
-                  <a:srgbClr val="5B6678"/>
-                </a:solidFill>
-                <a:latin typeface="Arial"/>
-              </a:rPr>
-              <a:t>37 / 40</a:t>
-            </a:r>
-          </a:p>
-        </p:txBody>
-      </p:sp>
     </p:spTree>
   </p:cSld>
   <p:clrMapOvr>
@@ -47929,45 +46720,6 @@
                 <a:latin typeface="Arial"/>
               </a:rPr>
               <a:t>   ·   MIT NANDA, State of AI in Business 2025 — a report with a methodology (150 interviews + 350 survey + 300 deployments), not a universal law.</a:t>
-            </a:r>
-          </a:p>
-        </p:txBody>
-      </p:sp>
-      <p:sp>
-        <p:nvSpPr>
-          <p:cNvPr id="23" name="TextBox 22"/>
-          <p:cNvSpPr txBox="1"/>
-          <p:nvPr/>
-        </p:nvSpPr>
-        <p:spPr>
-          <a:xfrm>
-            <a:off x="11274552" y="6547104"/>
-            <a:ext cx="868680" cy="256032"/>
-          </a:xfrm>
-          <a:prstGeom prst="rect">
-            <a:avLst/>
-          </a:prstGeom>
-          <a:noFill/>
-        </p:spPr>
-        <p:txBody>
-          <a:bodyPr wrap="none" lIns="0" rIns="0" tIns="0" bIns="0">
-            <a:spAutoFit/>
-          </a:bodyPr>
-          <a:lstStyle/>
-          <a:p>
-            <a:pPr algn="r">
-              <a:lnSpc>
-                <a:spcPct val="100000"/>
-              </a:lnSpc>
-            </a:pPr>
-            <a:r>
-              <a:rPr sz="1000" i="1">
-                <a:solidFill>
-                  <a:srgbClr val="5B6678"/>
-                </a:solidFill>
-                <a:latin typeface="Arial"/>
-              </a:rPr>
-              <a:t>38 / 40</a:t>
             </a:r>
           </a:p>
         </p:txBody>
@@ -48601,45 +47353,6 @@
           </a:p>
         </p:txBody>
       </p:sp>
-      <p:sp>
-        <p:nvSpPr>
-          <p:cNvPr id="18" name="TextBox 17"/>
-          <p:cNvSpPr txBox="1"/>
-          <p:nvPr/>
-        </p:nvSpPr>
-        <p:spPr>
-          <a:xfrm>
-            <a:off x="11274552" y="6547104"/>
-            <a:ext cx="868680" cy="256032"/>
-          </a:xfrm>
-          <a:prstGeom prst="rect">
-            <a:avLst/>
-          </a:prstGeom>
-          <a:noFill/>
-        </p:spPr>
-        <p:txBody>
-          <a:bodyPr wrap="none" lIns="0" rIns="0" tIns="0" bIns="0">
-            <a:spAutoFit/>
-          </a:bodyPr>
-          <a:lstStyle/>
-          <a:p>
-            <a:pPr algn="r">
-              <a:lnSpc>
-                <a:spcPct val="100000"/>
-              </a:lnSpc>
-            </a:pPr>
-            <a:r>
-              <a:rPr sz="1000" i="1">
-                <a:solidFill>
-                  <a:srgbClr val="5B6678"/>
-                </a:solidFill>
-                <a:latin typeface="Arial"/>
-              </a:rPr>
-              <a:t>39 / 40</a:t>
-            </a:r>
-          </a:p>
-        </p:txBody>
-      </p:sp>
     </p:spTree>
   </p:cSld>
   <p:clrMapOvr>
@@ -49637,45 +48350,6 @@
                 <a:latin typeface="Arial"/>
               </a:rPr>
               <a:t>Carried over ready from Lecture 2: single-shot inference and semantic search on embeddings (the basis of RAG). The details of each wrapper come later, section by section.</a:t>
-            </a:r>
-          </a:p>
-        </p:txBody>
-      </p:sp>
-      <p:sp>
-        <p:nvSpPr>
-          <p:cNvPr id="28" name="TextBox 27"/>
-          <p:cNvSpPr txBox="1"/>
-          <p:nvPr/>
-        </p:nvSpPr>
-        <p:spPr>
-          <a:xfrm>
-            <a:off x="11274552" y="6547104"/>
-            <a:ext cx="868680" cy="256032"/>
-          </a:xfrm>
-          <a:prstGeom prst="rect">
-            <a:avLst/>
-          </a:prstGeom>
-          <a:noFill/>
-        </p:spPr>
-        <p:txBody>
-          <a:bodyPr wrap="none" lIns="0" rIns="0" tIns="0" bIns="0">
-            <a:spAutoFit/>
-          </a:bodyPr>
-          <a:lstStyle/>
-          <a:p>
-            <a:pPr algn="r">
-              <a:lnSpc>
-                <a:spcPct val="100000"/>
-              </a:lnSpc>
-            </a:pPr>
-            <a:r>
-              <a:rPr sz="1000" i="1">
-                <a:solidFill>
-                  <a:srgbClr val="5B6678"/>
-                </a:solidFill>
-                <a:latin typeface="Arial"/>
-              </a:rPr>
-              <a:t>4 / 40</a:t>
             </a:r>
           </a:p>
         </p:txBody>
@@ -49823,45 +48497,6 @@
           </a:p>
         </p:txBody>
       </p:sp>
-      <p:sp>
-        <p:nvSpPr>
-          <p:cNvPr id="5" name="TextBox 4"/>
-          <p:cNvSpPr txBox="1"/>
-          <p:nvPr/>
-        </p:nvSpPr>
-        <p:spPr>
-          <a:xfrm>
-            <a:off x="11274552" y="6547104"/>
-            <a:ext cx="868680" cy="256032"/>
-          </a:xfrm>
-          <a:prstGeom prst="rect">
-            <a:avLst/>
-          </a:prstGeom>
-          <a:noFill/>
-        </p:spPr>
-        <p:txBody>
-          <a:bodyPr wrap="none" lIns="0" rIns="0" tIns="0" bIns="0">
-            <a:spAutoFit/>
-          </a:bodyPr>
-          <a:lstStyle/>
-          <a:p>
-            <a:pPr algn="r">
-              <a:lnSpc>
-                <a:spcPct val="100000"/>
-              </a:lnSpc>
-            </a:pPr>
-            <a:r>
-              <a:rPr sz="1000" i="1">
-                <a:solidFill>
-                  <a:srgbClr val="5B6678"/>
-                </a:solidFill>
-                <a:latin typeface="Arial"/>
-              </a:rPr>
-              <a:t>40 / 40</a:t>
-            </a:r>
-          </a:p>
-        </p:txBody>
-      </p:sp>
     </p:spTree>
   </p:cSld>
   <p:clrMapOvr>
@@ -51528,45 +50163,6 @@
                 <a:latin typeface="Arial"/>
               </a:rPr>
               <a:t>The ladder is a map of the lecture, not a demand to understand everything now. We cover each rung separately.</a:t>
-            </a:r>
-          </a:p>
-        </p:txBody>
-      </p:sp>
-      <p:sp>
-        <p:nvSpPr>
-          <p:cNvPr id="42" name="TextBox 41"/>
-          <p:cNvSpPr txBox="1"/>
-          <p:nvPr/>
-        </p:nvSpPr>
-        <p:spPr>
-          <a:xfrm>
-            <a:off x="11274552" y="6547104"/>
-            <a:ext cx="868680" cy="256032"/>
-          </a:xfrm>
-          <a:prstGeom prst="rect">
-            <a:avLst/>
-          </a:prstGeom>
-          <a:noFill/>
-        </p:spPr>
-        <p:txBody>
-          <a:bodyPr wrap="none" lIns="0" rIns="0" tIns="0" bIns="0">
-            <a:spAutoFit/>
-          </a:bodyPr>
-          <a:lstStyle/>
-          <a:p>
-            <a:pPr algn="r">
-              <a:lnSpc>
-                <a:spcPct val="100000"/>
-              </a:lnSpc>
-            </a:pPr>
-            <a:r>
-              <a:rPr sz="1000" i="1">
-                <a:solidFill>
-                  <a:srgbClr val="5B6678"/>
-                </a:solidFill>
-                <a:latin typeface="Arial"/>
-              </a:rPr>
-              <a:t>5 / 40</a:t>
             </a:r>
           </a:p>
         </p:txBody>
@@ -52553,45 +51149,6 @@
           </a:p>
         </p:txBody>
       </p:sp>
-      <p:sp>
-        <p:nvSpPr>
-          <p:cNvPr id="25" name="TextBox 24"/>
-          <p:cNvSpPr txBox="1"/>
-          <p:nvPr/>
-        </p:nvSpPr>
-        <p:spPr>
-          <a:xfrm>
-            <a:off x="11274552" y="6547104"/>
-            <a:ext cx="868680" cy="256032"/>
-          </a:xfrm>
-          <a:prstGeom prst="rect">
-            <a:avLst/>
-          </a:prstGeom>
-          <a:noFill/>
-        </p:spPr>
-        <p:txBody>
-          <a:bodyPr wrap="none" lIns="0" rIns="0" tIns="0" bIns="0">
-            <a:spAutoFit/>
-          </a:bodyPr>
-          <a:lstStyle/>
-          <a:p>
-            <a:pPr algn="r">
-              <a:lnSpc>
-                <a:spcPct val="100000"/>
-              </a:lnSpc>
-            </a:pPr>
-            <a:r>
-              <a:rPr sz="1000" i="1">
-                <a:solidFill>
-                  <a:srgbClr val="5B6678"/>
-                </a:solidFill>
-                <a:latin typeface="Arial"/>
-              </a:rPr>
-              <a:t>6 / 40</a:t>
-            </a:r>
-          </a:p>
-        </p:txBody>
-      </p:sp>
     </p:spTree>
   </p:cSld>
   <p:clrMapOvr>
@@ -53507,45 +52064,6 @@
           </a:p>
         </p:txBody>
       </p:sp>
-      <p:sp>
-        <p:nvSpPr>
-          <p:cNvPr id="23" name="TextBox 22"/>
-          <p:cNvSpPr txBox="1"/>
-          <p:nvPr/>
-        </p:nvSpPr>
-        <p:spPr>
-          <a:xfrm>
-            <a:off x="11274552" y="6547104"/>
-            <a:ext cx="868680" cy="256032"/>
-          </a:xfrm>
-          <a:prstGeom prst="rect">
-            <a:avLst/>
-          </a:prstGeom>
-          <a:noFill/>
-        </p:spPr>
-        <p:txBody>
-          <a:bodyPr wrap="none" lIns="0" rIns="0" tIns="0" bIns="0">
-            <a:spAutoFit/>
-          </a:bodyPr>
-          <a:lstStyle/>
-          <a:p>
-            <a:pPr algn="r">
-              <a:lnSpc>
-                <a:spcPct val="100000"/>
-              </a:lnSpc>
-            </a:pPr>
-            <a:r>
-              <a:rPr sz="1000" i="1">
-                <a:solidFill>
-                  <a:srgbClr val="5B6678"/>
-                </a:solidFill>
-                <a:latin typeface="Arial"/>
-              </a:rPr>
-              <a:t>7 / 40</a:t>
-            </a:r>
-          </a:p>
-        </p:txBody>
-      </p:sp>
     </p:spTree>
   </p:cSld>
   <p:clrMapOvr>
@@ -54198,45 +52716,6 @@
           </a:p>
         </p:txBody>
       </p:sp>
-      <p:sp>
-        <p:nvSpPr>
-          <p:cNvPr id="17" name="TextBox 16"/>
-          <p:cNvSpPr txBox="1"/>
-          <p:nvPr/>
-        </p:nvSpPr>
-        <p:spPr>
-          <a:xfrm>
-            <a:off x="11274552" y="6547104"/>
-            <a:ext cx="868680" cy="256032"/>
-          </a:xfrm>
-          <a:prstGeom prst="rect">
-            <a:avLst/>
-          </a:prstGeom>
-          <a:noFill/>
-        </p:spPr>
-        <p:txBody>
-          <a:bodyPr wrap="none" lIns="0" rIns="0" tIns="0" bIns="0">
-            <a:spAutoFit/>
-          </a:bodyPr>
-          <a:lstStyle/>
-          <a:p>
-            <a:pPr algn="r">
-              <a:lnSpc>
-                <a:spcPct val="100000"/>
-              </a:lnSpc>
-            </a:pPr>
-            <a:r>
-              <a:rPr sz="1000" i="1">
-                <a:solidFill>
-                  <a:srgbClr val="5B6678"/>
-                </a:solidFill>
-                <a:latin typeface="Arial"/>
-              </a:rPr>
-              <a:t>8 / 40</a:t>
-            </a:r>
-          </a:p>
-        </p:txBody>
-      </p:sp>
     </p:spTree>
   </p:cSld>
   <p:clrMapOvr>
@@ -55427,45 +53906,6 @@
                 <a:latin typeface="Arial"/>
               </a:rPr>
               <a:t>A model that has been shown where the instruction ends and the data begins less often mistakes a fragment of data for a new command — the same confusion underlies prompt injection (Section 4).</a:t>
-            </a:r>
-          </a:p>
-        </p:txBody>
-      </p:sp>
-      <p:sp>
-        <p:nvSpPr>
-          <p:cNvPr id="31" name="TextBox 30"/>
-          <p:cNvSpPr txBox="1"/>
-          <p:nvPr/>
-        </p:nvSpPr>
-        <p:spPr>
-          <a:xfrm>
-            <a:off x="11274552" y="6547104"/>
-            <a:ext cx="868680" cy="256032"/>
-          </a:xfrm>
-          <a:prstGeom prst="rect">
-            <a:avLst/>
-          </a:prstGeom>
-          <a:noFill/>
-        </p:spPr>
-        <p:txBody>
-          <a:bodyPr wrap="none" lIns="0" rIns="0" tIns="0" bIns="0">
-            <a:spAutoFit/>
-          </a:bodyPr>
-          <a:lstStyle/>
-          <a:p>
-            <a:pPr algn="r">
-              <a:lnSpc>
-                <a:spcPct val="100000"/>
-              </a:lnSpc>
-            </a:pPr>
-            <a:r>
-              <a:rPr sz="1000" i="1">
-                <a:solidFill>
-                  <a:srgbClr val="5B6678"/>
-                </a:solidFill>
-                <a:latin typeface="Arial"/>
-              </a:rPr>
-              <a:t>9 / 40</a:t>
             </a:r>
           </a:p>
         </p:txBody>
